--- a/docs/review-01/第1次阶段性评审汇报.pptx
+++ b/docs/review-01/第1次阶段性评审汇报.pptx
@@ -2,21 +2,21 @@
 <file path=ppt/presentation.xml><?xml version="1.0" encoding="utf-8"?>
 <p:presentation xmlns:p="http://schemas.openxmlformats.org/presentationml/2006/main">
   <p:sldMasterIdLst>
-    <p:sldMasterId xmlns:r="http://schemas.openxmlformats.org/officeDocument/2006/relationships" id="2147483648" r:id="R05591594d6fd48e8"/>
+    <p:sldMasterId xmlns:r="http://schemas.openxmlformats.org/officeDocument/2006/relationships" id="2147483648" r:id="R1788aeb8fa4c4e0c"/>
   </p:sldMasterIdLst>
   <p:notesMasterIdLst>
-    <p:notesMasterId xmlns:r="http://schemas.openxmlformats.org/officeDocument/2006/relationships" r:id="R951d315f82f8431c"/>
+    <p:notesMasterId xmlns:r="http://schemas.openxmlformats.org/officeDocument/2006/relationships" r:id="Reef589bd4aed4a68"/>
   </p:notesMasterIdLst>
   <p:sldIdLst>
-    <p:sldId xmlns:r="http://schemas.openxmlformats.org/officeDocument/2006/relationships" id="256" r:id="R23e56d694ea4450f"/>
-    <p:sldId xmlns:r="http://schemas.openxmlformats.org/officeDocument/2006/relationships" id="257" r:id="R21f559d23e0d4910"/>
-    <p:sldId xmlns:r="http://schemas.openxmlformats.org/officeDocument/2006/relationships" id="258" r:id="Rbd32b2a5675e46a5"/>
-    <p:sldId xmlns:r="http://schemas.openxmlformats.org/officeDocument/2006/relationships" id="259" r:id="R4ea6400c91dc4da1"/>
-    <p:sldId xmlns:r="http://schemas.openxmlformats.org/officeDocument/2006/relationships" id="260" r:id="R7e75fe6462d24fec"/>
-    <p:sldId xmlns:r="http://schemas.openxmlformats.org/officeDocument/2006/relationships" id="261" r:id="R91e749aa59b248ca"/>
-    <p:sldId xmlns:r="http://schemas.openxmlformats.org/officeDocument/2006/relationships" id="262" r:id="R8e34f35e41df425b"/>
-    <p:sldId xmlns:r="http://schemas.openxmlformats.org/officeDocument/2006/relationships" id="263" r:id="R055d54b59b954091"/>
-    <p:sldId xmlns:r="http://schemas.openxmlformats.org/officeDocument/2006/relationships" id="264" r:id="Refce556c2da24194"/>
+    <p:sldId xmlns:r="http://schemas.openxmlformats.org/officeDocument/2006/relationships" id="256" r:id="R05715f732ceb497b"/>
+    <p:sldId xmlns:r="http://schemas.openxmlformats.org/officeDocument/2006/relationships" id="257" r:id="R442b08a9126b4f40"/>
+    <p:sldId xmlns:r="http://schemas.openxmlformats.org/officeDocument/2006/relationships" id="258" r:id="R0e584dd419ee4411"/>
+    <p:sldId xmlns:r="http://schemas.openxmlformats.org/officeDocument/2006/relationships" id="259" r:id="Rf2dca90fc47a40e3"/>
+    <p:sldId xmlns:r="http://schemas.openxmlformats.org/officeDocument/2006/relationships" id="260" r:id="R2538d2d2a2df4389"/>
+    <p:sldId xmlns:r="http://schemas.openxmlformats.org/officeDocument/2006/relationships" id="261" r:id="Rd6b5287a5a7d406e"/>
+    <p:sldId xmlns:r="http://schemas.openxmlformats.org/officeDocument/2006/relationships" id="262" r:id="Rf8a9713865534ff1"/>
+    <p:sldId xmlns:r="http://schemas.openxmlformats.org/officeDocument/2006/relationships" id="263" r:id="R66d8126a306c47e8"/>
+    <p:sldId xmlns:r="http://schemas.openxmlformats.org/officeDocument/2006/relationships" id="264" r:id="R2be573fe91644fd9"/>
   </p:sldIdLst>
   <p:sldSz cx="12192000" cy="6858000"/>
   <p:notesSz cx="6858000" cy="9144000"/>
@@ -470,7 +470,7 @@
           </a:p>
           <a:p xmlns:a="http://schemas.openxmlformats.org/drawingml/2006/main">
             <a:r>
-              <a:t>源码公开状态：2026-10-07查询 main，仅01前端模块4个文件。</a:t>
+              <a:t>源码公开状态：2026-10-07上传快照193b33f：01前端与05账号集成源码已公开，其余模块待上传。</a:t>
             </a:r>
           </a:p>
         </p:txBody>
@@ -560,7 +560,7 @@
           </a:p>
           <a:p xmlns:a="http://schemas.openxmlformats.org/drawingml/2006/main">
             <a:r>
-              <a:t>源码公开状态：2026-10-07查询 main，仅01前端模块4个文件。</a:t>
+              <a:t>源码公开状态：2026-10-07上传快照193b33f：01前端与05账号集成源码已公开，其余模块待上传。</a:t>
             </a:r>
           </a:p>
         </p:txBody>
@@ -650,7 +650,7 @@
           </a:p>
           <a:p xmlns:a="http://schemas.openxmlformats.org/drawingml/2006/main">
             <a:r>
-              <a:t>源码公开状态：2026-10-07查询 main，仅01前端模块4个文件。</a:t>
+              <a:t>源码公开状态：2026-10-07上传快照193b33f：01前端与05账号集成源码已公开，其余模块待上传。</a:t>
             </a:r>
           </a:p>
         </p:txBody>
@@ -740,7 +740,7 @@
           </a:p>
           <a:p xmlns:a="http://schemas.openxmlformats.org/drawingml/2006/main">
             <a:r>
-              <a:t>源码公开状态：2026-10-07查询 main，仅01前端模块4个文件。</a:t>
+              <a:t>源码公开状态：2026-10-07上传快照193b33f：01前端与05账号集成源码已公开，其余模块待上传。</a:t>
             </a:r>
           </a:p>
         </p:txBody>
@@ -810,7 +810,7 @@
           <a:lstStyle xmlns:a="http://schemas.openxmlformats.org/drawingml/2006/main"/>
           <a:p xmlns:a="http://schemas.openxmlformats.org/drawingml/2006/main">
             <a:r>
-              <a:t>展示GitHub四个文件和版本下载。公开模块覆盖率1/5=20%，仅上传覆盖率；总进度和权重由小组确认。没有宣称其余代码已公开或完整系统已验收。</a:t>
+              <a:t>展示GitHub四个文件和版本下载。上传快照193b33f已含01和05两个模块源码，2/5=40%，仅源码上传覆盖率；其余3个模块、README和运行验证待补，总进度和权重由小组确认。</a:t>
             </a:r>
           </a:p>
           <a:p xmlns:a="http://schemas.openxmlformats.org/drawingml/2006/main">
@@ -830,7 +830,7 @@
           </a:p>
           <a:p xmlns:a="http://schemas.openxmlformats.org/drawingml/2006/main">
             <a:r>
-              <a:t>源码公开状态：2026-10-07查询 main，仅01前端模块4个文件。</a:t>
+              <a:t>源码公开状态：2026-10-07上传快照193b33f：01前端与05账号集成源码已公开，其余模块待上传。</a:t>
             </a:r>
           </a:p>
         </p:txBody>
@@ -920,7 +920,7 @@
           </a:p>
           <a:p xmlns:a="http://schemas.openxmlformats.org/drawingml/2006/main">
             <a:r>
-              <a:t>源码公开状态：2026-10-07查询 main，仅01前端模块4个文件。</a:t>
+              <a:t>源码公开状态：2026-10-07上传快照193b33f：01前端与05账号集成源码已公开，其余模块待上传。</a:t>
             </a:r>
           </a:p>
         </p:txBody>
@@ -1010,7 +1010,7 @@
           </a:p>
           <a:p xmlns:a="http://schemas.openxmlformats.org/drawingml/2006/main">
             <a:r>
-              <a:t>源码公开状态：2026-10-07查询 main，仅01前端模块4个文件。</a:t>
+              <a:t>源码公开状态：2026-10-07上传快照193b33f：01前端与05账号集成源码已公开，其余模块待上传。</a:t>
             </a:r>
           </a:p>
         </p:txBody>
@@ -1100,7 +1100,7 @@
           </a:p>
           <a:p xmlns:a="http://schemas.openxmlformats.org/drawingml/2006/main">
             <a:r>
-              <a:t>源码公开状态：2026-10-07查询 main，仅01前端模块4个文件。</a:t>
+              <a:t>源码公开状态：2026-10-07上传快照193b33f：01前端与05账号集成源码已公开，其余模块待上传。</a:t>
             </a:r>
           </a:p>
         </p:txBody>
@@ -1190,7 +1190,7 @@
           </a:p>
           <a:p xmlns:a="http://schemas.openxmlformats.org/drawingml/2006/main">
             <a:r>
-              <a:t>源码公开状态：2026-10-07查询 main，仅01前端模块4个文件。</a:t>
+              <a:t>源码公开状态：2026-10-07上传快照193b33f：01前端与05账号集成源码已公开，其余模块待上传。</a:t>
             </a:r>
           </a:p>
         </p:txBody>
@@ -1258,7 +1258,7 @@
   </p:cSld>
   <p:clrMap bg1="lt1" tx1="dk1" bg2="lt2" tx2="dk2" accent1="accent1" accent2="accent2" accent3="accent3" accent4="accent4" accent5="accent5" accent6="accent6" hlink="hlink" folHlink="folHlink"/>
   <p:sldLayoutIdLst>
-    <p:sldLayoutId xmlns:r="http://schemas.openxmlformats.org/officeDocument/2006/relationships" id="2147483649" r:id="Rf51d91ebc1de49e1"/>
+    <p:sldLayoutId xmlns:r="http://schemas.openxmlformats.org/officeDocument/2006/relationships" id="2147483649" r:id="R3a949d43c6f04870"/>
   </p:sldLayoutIdLst>
   <p:txStyles>
     <p:titleStyle>
@@ -1809,7 +1809,7 @@
           <p:cNvPr id="8" name="">
             <a:extLst xmlns:a="http://schemas.openxmlformats.org/drawingml/2006/main">
               <a:ext uri="{FF2B5EF4-FFF2-40B4-BE49-F238E27FC236}">
-                <a16:creationId xmlns:a16="http://schemas.microsoft.com/office/drawing/2014/main" id="{B3CB5F4E-872F-49DA-BC9D-E8E32A2B8F06}"/>
+                <a16:creationId xmlns:a16="http://schemas.microsoft.com/office/drawing/2014/main" id="{5A9A3DF2-4F68-4691-91A3-D07FF2017FF4}"/>
               </a:ext>
             </a:extLst>
           </p:cNvPr>
@@ -1866,7 +1866,7 @@
           <p:cNvPr id="2" name="">
             <a:extLst xmlns:a="http://schemas.openxmlformats.org/drawingml/2006/main">
               <a:ext uri="{FF2B5EF4-FFF2-40B4-BE49-F238E27FC236}">
-                <a16:creationId xmlns:a16="http://schemas.microsoft.com/office/drawing/2014/main" id="{664BCC83-7D4E-4878-B8A8-8CBBD82E7138}"/>
+                <a16:creationId xmlns:a16="http://schemas.microsoft.com/office/drawing/2014/main" id="{39BFE0E4-CE6E-4F4E-86E4-3A092D2B7A56}"/>
               </a:ext>
             </a:extLst>
           </p:cNvPr>
@@ -1923,7 +1923,7 @@
           <p:cNvPr id="3" name="">
             <a:extLst xmlns:a="http://schemas.openxmlformats.org/drawingml/2006/main">
               <a:ext uri="{FF2B5EF4-FFF2-40B4-BE49-F238E27FC236}">
-                <a16:creationId xmlns:a16="http://schemas.microsoft.com/office/drawing/2014/main" id="{6398A970-AD2B-47D8-A52A-897B8F17DAE2}"/>
+                <a16:creationId xmlns:a16="http://schemas.microsoft.com/office/drawing/2014/main" id="{6CEC7A1C-D9CA-4EAA-8013-D45B18F9AD69}"/>
               </a:ext>
             </a:extLst>
           </p:cNvPr>
@@ -1980,7 +1980,7 @@
           <p:cNvPr id="4" name="">
             <a:extLst xmlns:a="http://schemas.openxmlformats.org/drawingml/2006/main">
               <a:ext uri="{FF2B5EF4-FFF2-40B4-BE49-F238E27FC236}">
-                <a16:creationId xmlns:a16="http://schemas.microsoft.com/office/drawing/2014/main" id="{94D735BC-42A9-4285-8675-B6AF37BC18A2}"/>
+                <a16:creationId xmlns:a16="http://schemas.microsoft.com/office/drawing/2014/main" id="{883A93C2-84F9-439B-BC6B-EE4F3CE7C2A4}"/>
               </a:ext>
             </a:extLst>
           </p:cNvPr>
@@ -2037,7 +2037,7 @@
           <p:cNvPr id="5" name="">
             <a:extLst xmlns:a="http://schemas.openxmlformats.org/drawingml/2006/main">
               <a:ext uri="{FF2B5EF4-FFF2-40B4-BE49-F238E27FC236}">
-                <a16:creationId xmlns:a16="http://schemas.microsoft.com/office/drawing/2014/main" id="{D670F1C1-7C78-40B6-840B-6BB0F826D510}"/>
+                <a16:creationId xmlns:a16="http://schemas.microsoft.com/office/drawing/2014/main" id="{F35A9518-099D-4DFC-95B0-F5A7BD1DCCD9}"/>
               </a:ext>
             </a:extLst>
           </p:cNvPr>
@@ -2094,7 +2094,7 @@
           <p:cNvPr id="6" name="">
             <a:extLst xmlns:a="http://schemas.openxmlformats.org/drawingml/2006/main">
               <a:ext uri="{FF2B5EF4-FFF2-40B4-BE49-F238E27FC236}">
-                <a16:creationId xmlns:a16="http://schemas.microsoft.com/office/drawing/2014/main" id="{AF595D1B-1747-455C-A610-3F488B25FEC3}"/>
+                <a16:creationId xmlns:a16="http://schemas.microsoft.com/office/drawing/2014/main" id="{0EEE4CF3-1C00-41CF-9AA2-EDAE32438769}"/>
               </a:ext>
             </a:extLst>
           </p:cNvPr>
@@ -2151,7 +2151,7 @@
           <p:cNvPr id="7" name="">
             <a:extLst xmlns:a="http://schemas.openxmlformats.org/drawingml/2006/main">
               <a:ext uri="{FF2B5EF4-FFF2-40B4-BE49-F238E27FC236}">
-                <a16:creationId xmlns:a16="http://schemas.microsoft.com/office/drawing/2014/main" id="{BDE2972E-81CE-48D0-A70A-FCE9FC6CB8C4}"/>
+                <a16:creationId xmlns:a16="http://schemas.microsoft.com/office/drawing/2014/main" id="{D2C151D7-0413-414E-8E23-C859F2C4E0FD}"/>
               </a:ext>
             </a:extLst>
           </p:cNvPr>
@@ -2206,7 +2206,7 @@
     </p:spTree>
     <p:extLst>
       <p:ext uri="{BB962C8B-B14F-4D97-AF65-F5344CB8AC3E}">
-        <p14:creationId xmlns:p14="http://schemas.microsoft.com/office/powerpoint/2010/main" val="407040312"/>
+        <p14:creationId xmlns:p14="http://schemas.microsoft.com/office/powerpoint/2010/main" val="1661759602"/>
       </p:ext>
     </p:extLst>
   </p:cSld>
@@ -2237,7 +2237,7 @@
           <p:cNvPr id="10" name="">
             <a:extLst xmlns:a="http://schemas.openxmlformats.org/drawingml/2006/main">
               <a:ext uri="{FF2B5EF4-FFF2-40B4-BE49-F238E27FC236}">
-                <a16:creationId xmlns:a16="http://schemas.microsoft.com/office/drawing/2014/main" id="{5258AB41-A509-4D41-9D70-A3BEBE61BA06}"/>
+                <a16:creationId xmlns:a16="http://schemas.microsoft.com/office/drawing/2014/main" id="{0D4BB082-92A5-4B76-9F11-A2B435267230}"/>
               </a:ext>
             </a:extLst>
           </p:cNvPr>
@@ -2294,7 +2294,7 @@
           <p:cNvPr id="2" name="">
             <a:extLst xmlns:a="http://schemas.openxmlformats.org/drawingml/2006/main">
               <a:ext uri="{FF2B5EF4-FFF2-40B4-BE49-F238E27FC236}">
-                <a16:creationId xmlns:a16="http://schemas.microsoft.com/office/drawing/2014/main" id="{3177421C-FCC4-4683-8877-86567228F224}"/>
+                <a16:creationId xmlns:a16="http://schemas.microsoft.com/office/drawing/2014/main" id="{B9E29205-06D1-4972-BCEF-BC22893D74BB}"/>
               </a:ext>
             </a:extLst>
           </p:cNvPr>
@@ -2351,7 +2351,7 @@
           <p:cNvPr id="3" name="">
             <a:extLst xmlns:a="http://schemas.openxmlformats.org/drawingml/2006/main">
               <a:ext uri="{FF2B5EF4-FFF2-40B4-BE49-F238E27FC236}">
-                <a16:creationId xmlns:a16="http://schemas.microsoft.com/office/drawing/2014/main" id="{E3C3D27A-58F7-4162-A58A-E3F2E5871D5B}"/>
+                <a16:creationId xmlns:a16="http://schemas.microsoft.com/office/drawing/2014/main" id="{E13BD5DF-DE2E-4E56-915B-41EEFCE43BEE}"/>
               </a:ext>
             </a:extLst>
           </p:cNvPr>
@@ -2408,7 +2408,7 @@
           <p:cNvPr id="4" name="">
             <a:extLst xmlns:a="http://schemas.openxmlformats.org/drawingml/2006/main">
               <a:ext uri="{FF2B5EF4-FFF2-40B4-BE49-F238E27FC236}">
-                <a16:creationId xmlns:a16="http://schemas.microsoft.com/office/drawing/2014/main" id="{CFE7F102-DB0A-4610-98A8-AE3ABD2C007A}"/>
+                <a16:creationId xmlns:a16="http://schemas.microsoft.com/office/drawing/2014/main" id="{73F801FB-C60C-4CD9-96DD-10A2F3CEB4F7}"/>
               </a:ext>
             </a:extLst>
           </p:cNvPr>
@@ -2465,7 +2465,7 @@
           <p:cNvPr id="5" name="">
             <a:extLst xmlns:a="http://schemas.openxmlformats.org/drawingml/2006/main">
               <a:ext uri="{FF2B5EF4-FFF2-40B4-BE49-F238E27FC236}">
-                <a16:creationId xmlns:a16="http://schemas.microsoft.com/office/drawing/2014/main" id="{80D3DA09-FF81-41A0-A125-D31AA025EE4F}"/>
+                <a16:creationId xmlns:a16="http://schemas.microsoft.com/office/drawing/2014/main" id="{C35DC76A-657D-46E8-9060-AB3C365D4CC5}"/>
               </a:ext>
             </a:extLst>
           </p:cNvPr>
@@ -2522,7 +2522,7 @@
           <p:cNvPr id="6" name="">
             <a:extLst xmlns:a="http://schemas.openxmlformats.org/drawingml/2006/main">
               <a:ext uri="{FF2B5EF4-FFF2-40B4-BE49-F238E27FC236}">
-                <a16:creationId xmlns:a16="http://schemas.microsoft.com/office/drawing/2014/main" id="{0198E97C-E672-4867-A39A-DA6B50B345D7}"/>
+                <a16:creationId xmlns:a16="http://schemas.microsoft.com/office/drawing/2014/main" id="{261C2FE2-640B-4F87-9564-9DE113811F18}"/>
               </a:ext>
             </a:extLst>
           </p:cNvPr>
@@ -2579,7 +2579,7 @@
           <p:cNvPr id="7" name="">
             <a:extLst xmlns:a="http://schemas.openxmlformats.org/drawingml/2006/main">
               <a:ext uri="{FF2B5EF4-FFF2-40B4-BE49-F238E27FC236}">
-                <a16:creationId xmlns:a16="http://schemas.microsoft.com/office/drawing/2014/main" id="{868CFAF2-019E-412D-80D3-C6338625282B}"/>
+                <a16:creationId xmlns:a16="http://schemas.microsoft.com/office/drawing/2014/main" id="{8FA4E117-0242-45B0-88CB-4A389529D23C}"/>
               </a:ext>
             </a:extLst>
           </p:cNvPr>
@@ -2636,7 +2636,7 @@
           <p:cNvPr id="8" name="">
             <a:extLst xmlns:a="http://schemas.openxmlformats.org/drawingml/2006/main">
               <a:ext uri="{FF2B5EF4-FFF2-40B4-BE49-F238E27FC236}">
-                <a16:creationId xmlns:a16="http://schemas.microsoft.com/office/drawing/2014/main" id="{4E725FE0-A0E2-470B-A29C-93073FB44A32}"/>
+                <a16:creationId xmlns:a16="http://schemas.microsoft.com/office/drawing/2014/main" id="{C804F177-17DD-4749-AF56-267B73F7CFBE}"/>
               </a:ext>
             </a:extLst>
           </p:cNvPr>
@@ -2693,7 +2693,7 @@
           <p:cNvPr id="9" name="">
             <a:extLst xmlns:a="http://schemas.openxmlformats.org/drawingml/2006/main">
               <a:ext uri="{FF2B5EF4-FFF2-40B4-BE49-F238E27FC236}">
-                <a16:creationId xmlns:a16="http://schemas.microsoft.com/office/drawing/2014/main" id="{12490F94-6D81-42D7-8B7B-7A36FF8EFE05}"/>
+                <a16:creationId xmlns:a16="http://schemas.microsoft.com/office/drawing/2014/main" id="{9CEFBB9E-A87D-49E6-A033-360193D2E548}"/>
               </a:ext>
             </a:extLst>
           </p:cNvPr>
@@ -2748,7 +2748,7 @@
     </p:spTree>
     <p:extLst>
       <p:ext uri="{BB962C8B-B14F-4D97-AF65-F5344CB8AC3E}">
-        <p14:creationId xmlns:p14="http://schemas.microsoft.com/office/powerpoint/2010/main" val="975409502"/>
+        <p14:creationId xmlns:p14="http://schemas.microsoft.com/office/powerpoint/2010/main" val="935091228"/>
       </p:ext>
     </p:extLst>
   </p:cSld>
@@ -2779,7 +2779,7 @@
           <p:cNvPr id="10" name="">
             <a:extLst xmlns:a="http://schemas.openxmlformats.org/drawingml/2006/main">
               <a:ext uri="{FF2B5EF4-FFF2-40B4-BE49-F238E27FC236}">
-                <a16:creationId xmlns:a16="http://schemas.microsoft.com/office/drawing/2014/main" id="{55DE9621-3C2E-4839-8623-C89A603BE815}"/>
+                <a16:creationId xmlns:a16="http://schemas.microsoft.com/office/drawing/2014/main" id="{ADCA37B3-9A25-46AC-9B5B-4A32F255BFB6}"/>
               </a:ext>
             </a:extLst>
           </p:cNvPr>
@@ -2836,7 +2836,7 @@
           <p:cNvPr id="2" name="">
             <a:extLst xmlns:a="http://schemas.openxmlformats.org/drawingml/2006/main">
               <a:ext uri="{FF2B5EF4-FFF2-40B4-BE49-F238E27FC236}">
-                <a16:creationId xmlns:a16="http://schemas.microsoft.com/office/drawing/2014/main" id="{FA4A180B-10F9-4F30-8BD9-9FCA04069F14}"/>
+                <a16:creationId xmlns:a16="http://schemas.microsoft.com/office/drawing/2014/main" id="{686C520F-7986-463E-88AE-5450327A4ECC}"/>
               </a:ext>
             </a:extLst>
           </p:cNvPr>
@@ -2893,7 +2893,7 @@
           <p:cNvPr id="3" name="">
             <a:extLst xmlns:a="http://schemas.openxmlformats.org/drawingml/2006/main">
               <a:ext uri="{FF2B5EF4-FFF2-40B4-BE49-F238E27FC236}">
-                <a16:creationId xmlns:a16="http://schemas.microsoft.com/office/drawing/2014/main" id="{0D062C9E-47EB-4A7E-A987-09B92D957DCE}"/>
+                <a16:creationId xmlns:a16="http://schemas.microsoft.com/office/drawing/2014/main" id="{A6DF5C97-1A65-4C76-B64F-DFE6A99042D7}"/>
               </a:ext>
             </a:extLst>
           </p:cNvPr>
@@ -2950,7 +2950,7 @@
           <p:cNvPr id="4" name="">
             <a:extLst xmlns:a="http://schemas.openxmlformats.org/drawingml/2006/main">
               <a:ext uri="{FF2B5EF4-FFF2-40B4-BE49-F238E27FC236}">
-                <a16:creationId xmlns:a16="http://schemas.microsoft.com/office/drawing/2014/main" id="{2E4FF4D6-C305-4DB5-A295-60E48837F2D1}"/>
+                <a16:creationId xmlns:a16="http://schemas.microsoft.com/office/drawing/2014/main" id="{D51A7712-3DDC-46E2-8AF6-DAFAFBEE4BD1}"/>
               </a:ext>
             </a:extLst>
           </p:cNvPr>
@@ -3007,7 +3007,7 @@
           <p:cNvPr id="5" name="">
             <a:extLst xmlns:a="http://schemas.openxmlformats.org/drawingml/2006/main">
               <a:ext uri="{FF2B5EF4-FFF2-40B4-BE49-F238E27FC236}">
-                <a16:creationId xmlns:a16="http://schemas.microsoft.com/office/drawing/2014/main" id="{45F893C7-F27C-419C-86B2-0A66ABC2D135}"/>
+                <a16:creationId xmlns:a16="http://schemas.microsoft.com/office/drawing/2014/main" id="{9C4D0E7A-5EB9-45AF-A100-C405783924AD}"/>
               </a:ext>
             </a:extLst>
           </p:cNvPr>
@@ -3064,7 +3064,7 @@
           <p:cNvPr id="6" name="">
             <a:extLst xmlns:a="http://schemas.openxmlformats.org/drawingml/2006/main">
               <a:ext uri="{FF2B5EF4-FFF2-40B4-BE49-F238E27FC236}">
-                <a16:creationId xmlns:a16="http://schemas.microsoft.com/office/drawing/2014/main" id="{4E5DDA7A-F823-40B2-BE5C-E3FD126CE490}"/>
+                <a16:creationId xmlns:a16="http://schemas.microsoft.com/office/drawing/2014/main" id="{CB59FED2-96AD-4F1F-8526-362FD3C74621}"/>
               </a:ext>
             </a:extLst>
           </p:cNvPr>
@@ -3121,7 +3121,7 @@
           <p:cNvPr id="7" name="">
             <a:extLst xmlns:a="http://schemas.openxmlformats.org/drawingml/2006/main">
               <a:ext uri="{FF2B5EF4-FFF2-40B4-BE49-F238E27FC236}">
-                <a16:creationId xmlns:a16="http://schemas.microsoft.com/office/drawing/2014/main" id="{49B46309-5C30-423D-874B-990090C58E16}"/>
+                <a16:creationId xmlns:a16="http://schemas.microsoft.com/office/drawing/2014/main" id="{BA7DE961-B6CA-4B3D-B8B8-2B00C163AEAD}"/>
               </a:ext>
             </a:extLst>
           </p:cNvPr>
@@ -3178,7 +3178,7 @@
           <p:cNvPr id="8" name="">
             <a:extLst xmlns:a="http://schemas.openxmlformats.org/drawingml/2006/main">
               <a:ext uri="{FF2B5EF4-FFF2-40B4-BE49-F238E27FC236}">
-                <a16:creationId xmlns:a16="http://schemas.microsoft.com/office/drawing/2014/main" id="{3A5691DE-33D9-4688-A3F6-A37F13E25FE9}"/>
+                <a16:creationId xmlns:a16="http://schemas.microsoft.com/office/drawing/2014/main" id="{9A1B454C-58C6-4226-9EFC-DFABB72D78E2}"/>
               </a:ext>
             </a:extLst>
           </p:cNvPr>
@@ -3235,7 +3235,7 @@
           <p:cNvPr id="9" name="">
             <a:extLst xmlns:a="http://schemas.openxmlformats.org/drawingml/2006/main">
               <a:ext uri="{FF2B5EF4-FFF2-40B4-BE49-F238E27FC236}">
-                <a16:creationId xmlns:a16="http://schemas.microsoft.com/office/drawing/2014/main" id="{C9428859-E8A3-4B7C-BA93-D9781BBD3B07}"/>
+                <a16:creationId xmlns:a16="http://schemas.microsoft.com/office/drawing/2014/main" id="{3A55370E-2CEB-4DCB-9DCF-E72153182CBB}"/>
               </a:ext>
             </a:extLst>
           </p:cNvPr>
@@ -3290,7 +3290,7 @@
     </p:spTree>
     <p:extLst>
       <p:ext uri="{BB962C8B-B14F-4D97-AF65-F5344CB8AC3E}">
-        <p14:creationId xmlns:p14="http://schemas.microsoft.com/office/powerpoint/2010/main" val="660239882"/>
+        <p14:creationId xmlns:p14="http://schemas.microsoft.com/office/powerpoint/2010/main" val="918348739"/>
       </p:ext>
     </p:extLst>
   </p:cSld>
@@ -3321,7 +3321,7 @@
           <p:cNvPr id="10" name="">
             <a:extLst xmlns:a="http://schemas.openxmlformats.org/drawingml/2006/main">
               <a:ext uri="{FF2B5EF4-FFF2-40B4-BE49-F238E27FC236}">
-                <a16:creationId xmlns:a16="http://schemas.microsoft.com/office/drawing/2014/main" id="{2B77B0BE-5093-4A71-B8E5-C64E7E2CB375}"/>
+                <a16:creationId xmlns:a16="http://schemas.microsoft.com/office/drawing/2014/main" id="{B98F6232-C8EB-455A-8EA1-F74D9FE6BBA0}"/>
               </a:ext>
             </a:extLst>
           </p:cNvPr>
@@ -3378,7 +3378,7 @@
           <p:cNvPr id="2" name="">
             <a:extLst xmlns:a="http://schemas.openxmlformats.org/drawingml/2006/main">
               <a:ext uri="{FF2B5EF4-FFF2-40B4-BE49-F238E27FC236}">
-                <a16:creationId xmlns:a16="http://schemas.microsoft.com/office/drawing/2014/main" id="{5844B842-6DF9-4DAD-8D02-3CF874BD3A01}"/>
+                <a16:creationId xmlns:a16="http://schemas.microsoft.com/office/drawing/2014/main" id="{EF9BA5EE-0603-4D7D-A4D8-00614BFCF1E7}"/>
               </a:ext>
             </a:extLst>
           </p:cNvPr>
@@ -3435,7 +3435,7 @@
           <p:cNvPr id="3" name="">
             <a:extLst xmlns:a="http://schemas.openxmlformats.org/drawingml/2006/main">
               <a:ext uri="{FF2B5EF4-FFF2-40B4-BE49-F238E27FC236}">
-                <a16:creationId xmlns:a16="http://schemas.microsoft.com/office/drawing/2014/main" id="{8E47A516-E565-4C25-877B-8EF1F361E32B}"/>
+                <a16:creationId xmlns:a16="http://schemas.microsoft.com/office/drawing/2014/main" id="{18ABA109-1A15-4D29-8749-D2332B6B927B}"/>
               </a:ext>
             </a:extLst>
           </p:cNvPr>
@@ -3482,7 +3482,7 @@
                 <a:ea typeface="Microsoft YaHei"/>
                 <a:cs typeface="Microsoft YaHei"/>
               </a:rPr>
-              <a:t>组长负责前端，四位组员今晚上传各自代码</a:t>
+              <a:t>组长负责前端，后端由组员本人陆续上传</a:t>
             </a:r>
           </a:p>
         </p:txBody>
@@ -3492,7 +3492,7 @@
           <p:cNvPr id="4" name="">
             <a:extLst xmlns:a="http://schemas.openxmlformats.org/drawingml/2006/main">
               <a:ext uri="{FF2B5EF4-FFF2-40B4-BE49-F238E27FC236}">
-                <a16:creationId xmlns:a16="http://schemas.microsoft.com/office/drawing/2014/main" id="{168E417C-1F83-4157-9687-30FD96C0A862}"/>
+                <a16:creationId xmlns:a16="http://schemas.microsoft.com/office/drawing/2014/main" id="{45AA9D14-48F4-4CC4-B788-C3394328256C}"/>
               </a:ext>
             </a:extLst>
           </p:cNvPr>
@@ -3549,7 +3549,7 @@
           <p:cNvPr id="5" name="">
             <a:extLst xmlns:a="http://schemas.openxmlformats.org/drawingml/2006/main">
               <a:ext uri="{FF2B5EF4-FFF2-40B4-BE49-F238E27FC236}">
-                <a16:creationId xmlns:a16="http://schemas.microsoft.com/office/drawing/2014/main" id="{89B80C4E-FF82-4B11-AEC0-A8A2978BDE33}"/>
+                <a16:creationId xmlns:a16="http://schemas.microsoft.com/office/drawing/2014/main" id="{F65C3619-44AD-43DE-BC0C-9B867D0045DE}"/>
               </a:ext>
             </a:extLst>
           </p:cNvPr>
@@ -3606,7 +3606,7 @@
           <p:cNvPr id="6" name="">
             <a:extLst xmlns:a="http://schemas.openxmlformats.org/drawingml/2006/main">
               <a:ext uri="{FF2B5EF4-FFF2-40B4-BE49-F238E27FC236}">
-                <a16:creationId xmlns:a16="http://schemas.microsoft.com/office/drawing/2014/main" id="{FA0CC542-3AC1-4AD3-AA70-647C9F2706E5}"/>
+                <a16:creationId xmlns:a16="http://schemas.microsoft.com/office/drawing/2014/main" id="{348F6E55-E5C1-45D1-8986-6DBC979931E9}"/>
               </a:ext>
             </a:extLst>
           </p:cNvPr>
@@ -3663,7 +3663,7 @@
           <p:cNvPr id="7" name="">
             <a:extLst xmlns:a="http://schemas.openxmlformats.org/drawingml/2006/main">
               <a:ext uri="{FF2B5EF4-FFF2-40B4-BE49-F238E27FC236}">
-                <a16:creationId xmlns:a16="http://schemas.microsoft.com/office/drawing/2014/main" id="{3727E7BA-4A5F-4D56-A328-769A7B8D36B0}"/>
+                <a16:creationId xmlns:a16="http://schemas.microsoft.com/office/drawing/2014/main" id="{52EC6C59-1A50-471A-9DAB-51A5D868C0F0}"/>
               </a:ext>
             </a:extLst>
           </p:cNvPr>
@@ -3720,7 +3720,7 @@
           <p:cNvPr id="8" name="">
             <a:extLst xmlns:a="http://schemas.openxmlformats.org/drawingml/2006/main">
               <a:ext uri="{FF2B5EF4-FFF2-40B4-BE49-F238E27FC236}">
-                <a16:creationId xmlns:a16="http://schemas.microsoft.com/office/drawing/2014/main" id="{835E47F6-036A-4A16-84F5-03FEF6702818}"/>
+                <a16:creationId xmlns:a16="http://schemas.microsoft.com/office/drawing/2014/main" id="{D92A9B59-132D-4914-9AFA-B60B1955438C}"/>
               </a:ext>
             </a:extLst>
           </p:cNvPr>
@@ -3777,7 +3777,7 @@
           <p:cNvPr id="9" name="">
             <a:extLst xmlns:a="http://schemas.openxmlformats.org/drawingml/2006/main">
               <a:ext uri="{FF2B5EF4-FFF2-40B4-BE49-F238E27FC236}">
-                <a16:creationId xmlns:a16="http://schemas.microsoft.com/office/drawing/2014/main" id="{AA15A186-A9DB-41D3-87EC-C80A5B11C3A3}"/>
+                <a16:creationId xmlns:a16="http://schemas.microsoft.com/office/drawing/2014/main" id="{44FD9B95-20B4-4D57-9EBD-3923FEBC5B1F}"/>
               </a:ext>
             </a:extLst>
           </p:cNvPr>
@@ -3832,7 +3832,7 @@
     </p:spTree>
     <p:extLst>
       <p:ext uri="{BB962C8B-B14F-4D97-AF65-F5344CB8AC3E}">
-        <p14:creationId xmlns:p14="http://schemas.microsoft.com/office/powerpoint/2010/main" val="1326549668"/>
+        <p14:creationId xmlns:p14="http://schemas.microsoft.com/office/powerpoint/2010/main" val="64662789"/>
       </p:ext>
     </p:extLst>
   </p:cSld>
@@ -3863,7 +3863,7 @@
           <p:cNvPr id="10" name="">
             <a:extLst xmlns:a="http://schemas.openxmlformats.org/drawingml/2006/main">
               <a:ext uri="{FF2B5EF4-FFF2-40B4-BE49-F238E27FC236}">
-                <a16:creationId xmlns:a16="http://schemas.microsoft.com/office/drawing/2014/main" id="{0F850D8A-861B-437E-82DF-8FEEFE4A6A99}"/>
+                <a16:creationId xmlns:a16="http://schemas.microsoft.com/office/drawing/2014/main" id="{4DF93906-B6C5-49FF-B960-B88EA6A1ED45}"/>
               </a:ext>
             </a:extLst>
           </p:cNvPr>
@@ -3920,7 +3920,7 @@
           <p:cNvPr id="2" name="">
             <a:extLst xmlns:a="http://schemas.openxmlformats.org/drawingml/2006/main">
               <a:ext uri="{FF2B5EF4-FFF2-40B4-BE49-F238E27FC236}">
-                <a16:creationId xmlns:a16="http://schemas.microsoft.com/office/drawing/2014/main" id="{04DBD818-AEDC-4B71-BBFC-AB5ABB5F032F}"/>
+                <a16:creationId xmlns:a16="http://schemas.microsoft.com/office/drawing/2014/main" id="{98A70DBF-F4F0-4466-AD5A-4615EEB326C2}"/>
               </a:ext>
             </a:extLst>
           </p:cNvPr>
@@ -3977,7 +3977,7 @@
           <p:cNvPr id="3" name="">
             <a:extLst xmlns:a="http://schemas.openxmlformats.org/drawingml/2006/main">
               <a:ext uri="{FF2B5EF4-FFF2-40B4-BE49-F238E27FC236}">
-                <a16:creationId xmlns:a16="http://schemas.microsoft.com/office/drawing/2014/main" id="{6BADFE94-28EC-416F-AF6D-752D4BC598F2}"/>
+                <a16:creationId xmlns:a16="http://schemas.microsoft.com/office/drawing/2014/main" id="{D866A0D3-870D-4ED3-8823-CD5087ADF6D6}"/>
               </a:ext>
             </a:extLst>
           </p:cNvPr>
@@ -4034,7 +4034,7 @@
           <p:cNvPr id="4" name="">
             <a:extLst xmlns:a="http://schemas.openxmlformats.org/drawingml/2006/main">
               <a:ext uri="{FF2B5EF4-FFF2-40B4-BE49-F238E27FC236}">
-                <a16:creationId xmlns:a16="http://schemas.microsoft.com/office/drawing/2014/main" id="{10AB2688-973F-4192-BE1B-DAF666C4BDB2}"/>
+                <a16:creationId xmlns:a16="http://schemas.microsoft.com/office/drawing/2014/main" id="{A4780D5C-4BAD-4926-8420-9D8339CE2EBF}"/>
               </a:ext>
             </a:extLst>
           </p:cNvPr>
@@ -4091,7 +4091,7 @@
           <p:cNvPr id="5" name="">
             <a:extLst xmlns:a="http://schemas.openxmlformats.org/drawingml/2006/main">
               <a:ext uri="{FF2B5EF4-FFF2-40B4-BE49-F238E27FC236}">
-                <a16:creationId xmlns:a16="http://schemas.microsoft.com/office/drawing/2014/main" id="{38FA99CF-71B0-46A1-ABF3-FCCD67956B3F}"/>
+                <a16:creationId xmlns:a16="http://schemas.microsoft.com/office/drawing/2014/main" id="{106CF117-4F23-4FCF-9D49-1C23CB8CCADE}"/>
               </a:ext>
             </a:extLst>
           </p:cNvPr>
@@ -4148,7 +4148,7 @@
           <p:cNvPr id="6" name="">
             <a:extLst xmlns:a="http://schemas.openxmlformats.org/drawingml/2006/main">
               <a:ext uri="{FF2B5EF4-FFF2-40B4-BE49-F238E27FC236}">
-                <a16:creationId xmlns:a16="http://schemas.microsoft.com/office/drawing/2014/main" id="{BA91C6E4-9B30-4E87-928B-9E001B8FE3BF}"/>
+                <a16:creationId xmlns:a16="http://schemas.microsoft.com/office/drawing/2014/main" id="{27F69C69-7ECC-4294-BB81-9274EB51323B}"/>
               </a:ext>
             </a:extLst>
           </p:cNvPr>
@@ -4205,7 +4205,7 @@
           <p:cNvPr id="7" name="">
             <a:extLst xmlns:a="http://schemas.openxmlformats.org/drawingml/2006/main">
               <a:ext uri="{FF2B5EF4-FFF2-40B4-BE49-F238E27FC236}">
-                <a16:creationId xmlns:a16="http://schemas.microsoft.com/office/drawing/2014/main" id="{AFBA21F8-5EE1-49A9-BC4A-92DE639A488B}"/>
+                <a16:creationId xmlns:a16="http://schemas.microsoft.com/office/drawing/2014/main" id="{01496EBA-4555-47C6-9DEB-642C58C42D56}"/>
               </a:ext>
             </a:extLst>
           </p:cNvPr>
@@ -4262,7 +4262,7 @@
           <p:cNvPr id="8" name="">
             <a:extLst xmlns:a="http://schemas.openxmlformats.org/drawingml/2006/main">
               <a:ext uri="{FF2B5EF4-FFF2-40B4-BE49-F238E27FC236}">
-                <a16:creationId xmlns:a16="http://schemas.microsoft.com/office/drawing/2014/main" id="{C0E6AFF8-0273-4574-A711-1049B6380CB8}"/>
+                <a16:creationId xmlns:a16="http://schemas.microsoft.com/office/drawing/2014/main" id="{17E89CBB-1A0D-4FFE-8A4A-DF9356F3A6E8}"/>
               </a:ext>
             </a:extLst>
           </p:cNvPr>
@@ -4319,7 +4319,7 @@
           <p:cNvPr id="9" name="">
             <a:extLst xmlns:a="http://schemas.openxmlformats.org/drawingml/2006/main">
               <a:ext uri="{FF2B5EF4-FFF2-40B4-BE49-F238E27FC236}">
-                <a16:creationId xmlns:a16="http://schemas.microsoft.com/office/drawing/2014/main" id="{A85F2C90-BE5F-4885-A268-E0AE86F8A386}"/>
+                <a16:creationId xmlns:a16="http://schemas.microsoft.com/office/drawing/2014/main" id="{5B5813C9-4911-4949-A034-3AB0C1F422FB}"/>
               </a:ext>
             </a:extLst>
           </p:cNvPr>
@@ -4374,7 +4374,7 @@
     </p:spTree>
     <p:extLst>
       <p:ext uri="{BB962C8B-B14F-4D97-AF65-F5344CB8AC3E}">
-        <p14:creationId xmlns:p14="http://schemas.microsoft.com/office/powerpoint/2010/main" val="358571001"/>
+        <p14:creationId xmlns:p14="http://schemas.microsoft.com/office/powerpoint/2010/main" val="1166535393"/>
       </p:ext>
     </p:extLst>
   </p:cSld>
@@ -4405,7 +4405,7 @@
           <p:cNvPr id="10" name="">
             <a:extLst xmlns:a="http://schemas.openxmlformats.org/drawingml/2006/main">
               <a:ext uri="{FF2B5EF4-FFF2-40B4-BE49-F238E27FC236}">
-                <a16:creationId xmlns:a16="http://schemas.microsoft.com/office/drawing/2014/main" id="{DE214F2A-AA4C-4742-A136-82E5A3D3EE05}"/>
+                <a16:creationId xmlns:a16="http://schemas.microsoft.com/office/drawing/2014/main" id="{5925273E-B2A0-4077-8F5D-F17EE473A417}"/>
               </a:ext>
             </a:extLst>
           </p:cNvPr>
@@ -4462,7 +4462,7 @@
           <p:cNvPr id="2" name="">
             <a:extLst xmlns:a="http://schemas.openxmlformats.org/drawingml/2006/main">
               <a:ext uri="{FF2B5EF4-FFF2-40B4-BE49-F238E27FC236}">
-                <a16:creationId xmlns:a16="http://schemas.microsoft.com/office/drawing/2014/main" id="{3A94BACD-9569-40F7-A62A-01352B1B563B}"/>
+                <a16:creationId xmlns:a16="http://schemas.microsoft.com/office/drawing/2014/main" id="{45B4F211-3470-4636-A487-B29213678A0B}"/>
               </a:ext>
             </a:extLst>
           </p:cNvPr>
@@ -4519,7 +4519,7 @@
           <p:cNvPr id="3" name="">
             <a:extLst xmlns:a="http://schemas.openxmlformats.org/drawingml/2006/main">
               <a:ext uri="{FF2B5EF4-FFF2-40B4-BE49-F238E27FC236}">
-                <a16:creationId xmlns:a16="http://schemas.microsoft.com/office/drawing/2014/main" id="{B0958BE6-E78E-4B1A-9586-9F4AEA8F8D8B}"/>
+                <a16:creationId xmlns:a16="http://schemas.microsoft.com/office/drawing/2014/main" id="{CE0D757C-2BCF-4DB2-8D9C-0A3EB89C709C}"/>
               </a:ext>
             </a:extLst>
           </p:cNvPr>
@@ -4576,7 +4576,7 @@
           <p:cNvPr id="4" name="">
             <a:extLst xmlns:a="http://schemas.openxmlformats.org/drawingml/2006/main">
               <a:ext uri="{FF2B5EF4-FFF2-40B4-BE49-F238E27FC236}">
-                <a16:creationId xmlns:a16="http://schemas.microsoft.com/office/drawing/2014/main" id="{45AAA3A4-C9F9-4D4B-AD0F-0959AC200438}"/>
+                <a16:creationId xmlns:a16="http://schemas.microsoft.com/office/drawing/2014/main" id="{0084DA1E-B4B3-4056-875D-2003D0E65419}"/>
               </a:ext>
             </a:extLst>
           </p:cNvPr>
@@ -4633,7 +4633,7 @@
           <p:cNvPr id="5" name="">
             <a:extLst xmlns:a="http://schemas.openxmlformats.org/drawingml/2006/main">
               <a:ext uri="{FF2B5EF4-FFF2-40B4-BE49-F238E27FC236}">
-                <a16:creationId xmlns:a16="http://schemas.microsoft.com/office/drawing/2014/main" id="{170FDE1F-5EA6-47C0-8379-A079F352895F}"/>
+                <a16:creationId xmlns:a16="http://schemas.microsoft.com/office/drawing/2014/main" id="{4F5C9F82-2483-4B7F-B766-7914537D1902}"/>
               </a:ext>
             </a:extLst>
           </p:cNvPr>
@@ -4690,7 +4690,7 @@
           <p:cNvPr id="6" name="">
             <a:extLst xmlns:a="http://schemas.openxmlformats.org/drawingml/2006/main">
               <a:ext uri="{FF2B5EF4-FFF2-40B4-BE49-F238E27FC236}">
-                <a16:creationId xmlns:a16="http://schemas.microsoft.com/office/drawing/2014/main" id="{7309874D-454D-40AD-913A-07C28BD5E60C}"/>
+                <a16:creationId xmlns:a16="http://schemas.microsoft.com/office/drawing/2014/main" id="{DCAD596F-0A6F-42B6-8F29-976011086293}"/>
               </a:ext>
             </a:extLst>
           </p:cNvPr>
@@ -4747,7 +4747,7 @@
           <p:cNvPr id="7" name="">
             <a:extLst xmlns:a="http://schemas.openxmlformats.org/drawingml/2006/main">
               <a:ext uri="{FF2B5EF4-FFF2-40B4-BE49-F238E27FC236}">
-                <a16:creationId xmlns:a16="http://schemas.microsoft.com/office/drawing/2014/main" id="{5CF5CC1D-0115-4E7B-B86F-0A5590C5C035}"/>
+                <a16:creationId xmlns:a16="http://schemas.microsoft.com/office/drawing/2014/main" id="{BDDA3340-5312-4F99-97CD-F7A2214E9790}"/>
               </a:ext>
             </a:extLst>
           </p:cNvPr>
@@ -4804,7 +4804,7 @@
           <p:cNvPr id="8" name="">
             <a:extLst xmlns:a="http://schemas.openxmlformats.org/drawingml/2006/main">
               <a:ext uri="{FF2B5EF4-FFF2-40B4-BE49-F238E27FC236}">
-                <a16:creationId xmlns:a16="http://schemas.microsoft.com/office/drawing/2014/main" id="{7BE782AB-5C66-4F55-8933-8948B4D6E2A4}"/>
+                <a16:creationId xmlns:a16="http://schemas.microsoft.com/office/drawing/2014/main" id="{2095E0F8-6FC4-422D-8D4F-EAE3952F2EC3}"/>
               </a:ext>
             </a:extLst>
           </p:cNvPr>
@@ -4861,7 +4861,7 @@
           <p:cNvPr id="9" name="">
             <a:extLst xmlns:a="http://schemas.openxmlformats.org/drawingml/2006/main">
               <a:ext uri="{FF2B5EF4-FFF2-40B4-BE49-F238E27FC236}">
-                <a16:creationId xmlns:a16="http://schemas.microsoft.com/office/drawing/2014/main" id="{8D7BE03A-C158-4150-8ED5-D655BDD29486}"/>
+                <a16:creationId xmlns:a16="http://schemas.microsoft.com/office/drawing/2014/main" id="{318D6AE0-A370-4A9F-9294-093C9E0CA8BC}"/>
               </a:ext>
             </a:extLst>
           </p:cNvPr>
@@ -4916,7 +4916,7 @@
     </p:spTree>
     <p:extLst>
       <p:ext uri="{BB962C8B-B14F-4D97-AF65-F5344CB8AC3E}">
-        <p14:creationId xmlns:p14="http://schemas.microsoft.com/office/powerpoint/2010/main" val="1384642576"/>
+        <p14:creationId xmlns:p14="http://schemas.microsoft.com/office/powerpoint/2010/main" val="279110573"/>
       </p:ext>
     </p:extLst>
   </p:cSld>
@@ -4947,7 +4947,7 @@
           <p:cNvPr id="10" name="">
             <a:extLst xmlns:a="http://schemas.openxmlformats.org/drawingml/2006/main">
               <a:ext uri="{FF2B5EF4-FFF2-40B4-BE49-F238E27FC236}">
-                <a16:creationId xmlns:a16="http://schemas.microsoft.com/office/drawing/2014/main" id="{E0B8EDBE-B410-4643-BD5D-69646E7B5649}"/>
+                <a16:creationId xmlns:a16="http://schemas.microsoft.com/office/drawing/2014/main" id="{168FCCF9-75A2-45FE-AA2D-E3282A84B141}"/>
               </a:ext>
             </a:extLst>
           </p:cNvPr>
@@ -5004,7 +5004,7 @@
           <p:cNvPr id="2" name="">
             <a:extLst xmlns:a="http://schemas.openxmlformats.org/drawingml/2006/main">
               <a:ext uri="{FF2B5EF4-FFF2-40B4-BE49-F238E27FC236}">
-                <a16:creationId xmlns:a16="http://schemas.microsoft.com/office/drawing/2014/main" id="{E8D6E3A9-7AC5-476B-8AA2-15CE5351E072}"/>
+                <a16:creationId xmlns:a16="http://schemas.microsoft.com/office/drawing/2014/main" id="{E9960352-CA47-44E9-8AAC-EEDC843759A8}"/>
               </a:ext>
             </a:extLst>
           </p:cNvPr>
@@ -5061,7 +5061,7 @@
           <p:cNvPr id="3" name="">
             <a:extLst xmlns:a="http://schemas.openxmlformats.org/drawingml/2006/main">
               <a:ext uri="{FF2B5EF4-FFF2-40B4-BE49-F238E27FC236}">
-                <a16:creationId xmlns:a16="http://schemas.microsoft.com/office/drawing/2014/main" id="{FFC2ED0E-A16D-4F60-B50F-407389243DEA}"/>
+                <a16:creationId xmlns:a16="http://schemas.microsoft.com/office/drawing/2014/main" id="{B49F0E7C-3CD7-4745-82A5-542A172BD5C4}"/>
               </a:ext>
             </a:extLst>
           </p:cNvPr>
@@ -5118,7 +5118,7 @@
           <p:cNvPr id="4" name="">
             <a:extLst xmlns:a="http://schemas.openxmlformats.org/drawingml/2006/main">
               <a:ext uri="{FF2B5EF4-FFF2-40B4-BE49-F238E27FC236}">
-                <a16:creationId xmlns:a16="http://schemas.microsoft.com/office/drawing/2014/main" id="{1E97CDC8-720C-4AA1-B2E9-1A8D7935FE8F}"/>
+                <a16:creationId xmlns:a16="http://schemas.microsoft.com/office/drawing/2014/main" id="{E426BCD1-E6E4-45D8-A262-1A72B0771C09}"/>
               </a:ext>
             </a:extLst>
           </p:cNvPr>
@@ -5175,7 +5175,7 @@
           <p:cNvPr id="5" name="">
             <a:extLst xmlns:a="http://schemas.openxmlformats.org/drawingml/2006/main">
               <a:ext uri="{FF2B5EF4-FFF2-40B4-BE49-F238E27FC236}">
-                <a16:creationId xmlns:a16="http://schemas.microsoft.com/office/drawing/2014/main" id="{FDE0C4A6-795F-407E-BC40-7075CF3936C7}"/>
+                <a16:creationId xmlns:a16="http://schemas.microsoft.com/office/drawing/2014/main" id="{8A47158C-A734-406F-89FF-55F9E536A8D0}"/>
               </a:ext>
             </a:extLst>
           </p:cNvPr>
@@ -5232,7 +5232,7 @@
           <p:cNvPr id="6" name="">
             <a:extLst xmlns:a="http://schemas.openxmlformats.org/drawingml/2006/main">
               <a:ext uri="{FF2B5EF4-FFF2-40B4-BE49-F238E27FC236}">
-                <a16:creationId xmlns:a16="http://schemas.microsoft.com/office/drawing/2014/main" id="{72D78C95-5B2B-4F6E-9BF0-17EC488FC41C}"/>
+                <a16:creationId xmlns:a16="http://schemas.microsoft.com/office/drawing/2014/main" id="{03980280-67C1-4F42-A169-3765736D05FE}"/>
               </a:ext>
             </a:extLst>
           </p:cNvPr>
@@ -5279,7 +5279,7 @@
                 <a:ea typeface="Microsoft YaHei"/>
                 <a:cs typeface="Microsoft YaHei"/>
               </a:rPr>
-              <a:t>今晚核对 API 字段、路由、会话和启动入口</a:t>
+              <a:t>账号与集成已上传，另三个模块待汇入</a:t>
             </a:r>
           </a:p>
         </p:txBody>
@@ -5289,7 +5289,7 @@
           <p:cNvPr id="7" name="">
             <a:extLst xmlns:a="http://schemas.openxmlformats.org/drawingml/2006/main">
               <a:ext uri="{FF2B5EF4-FFF2-40B4-BE49-F238E27FC236}">
-                <a16:creationId xmlns:a16="http://schemas.microsoft.com/office/drawing/2014/main" id="{479B7FE9-4D94-42B9-BE76-4008ABF42716}"/>
+                <a16:creationId xmlns:a16="http://schemas.microsoft.com/office/drawing/2014/main" id="{8C5C4C1E-AF21-4775-BAD0-6F98833AEA63}"/>
               </a:ext>
             </a:extLst>
           </p:cNvPr>
@@ -5346,7 +5346,7 @@
           <p:cNvPr id="8" name="">
             <a:extLst xmlns:a="http://schemas.openxmlformats.org/drawingml/2006/main">
               <a:ext uri="{FF2B5EF4-FFF2-40B4-BE49-F238E27FC236}">
-                <a16:creationId xmlns:a16="http://schemas.microsoft.com/office/drawing/2014/main" id="{143B929D-43A4-4250-834E-54567CE6B38C}"/>
+                <a16:creationId xmlns:a16="http://schemas.microsoft.com/office/drawing/2014/main" id="{411DC130-2655-4CCE-9EC2-2D11B048E7A7}"/>
               </a:ext>
             </a:extLst>
           </p:cNvPr>
@@ -5403,7 +5403,7 @@
           <p:cNvPr id="9" name="">
             <a:extLst xmlns:a="http://schemas.openxmlformats.org/drawingml/2006/main">
               <a:ext uri="{FF2B5EF4-FFF2-40B4-BE49-F238E27FC236}">
-                <a16:creationId xmlns:a16="http://schemas.microsoft.com/office/drawing/2014/main" id="{3F492E23-7C2B-4764-AF71-DC2E835EB395}"/>
+                <a16:creationId xmlns:a16="http://schemas.microsoft.com/office/drawing/2014/main" id="{C6F9D44F-B321-4E41-B4E6-2AAF267A215B}"/>
               </a:ext>
             </a:extLst>
           </p:cNvPr>
@@ -5458,7 +5458,7 @@
     </p:spTree>
     <p:extLst>
       <p:ext uri="{BB962C8B-B14F-4D97-AF65-F5344CB8AC3E}">
-        <p14:creationId xmlns:p14="http://schemas.microsoft.com/office/powerpoint/2010/main" val="599854279"/>
+        <p14:creationId xmlns:p14="http://schemas.microsoft.com/office/powerpoint/2010/main" val="552104171"/>
       </p:ext>
     </p:extLst>
   </p:cSld>
@@ -5489,7 +5489,7 @@
           <p:cNvPr id="10" name="">
             <a:extLst xmlns:a="http://schemas.openxmlformats.org/drawingml/2006/main">
               <a:ext uri="{FF2B5EF4-FFF2-40B4-BE49-F238E27FC236}">
-                <a16:creationId xmlns:a16="http://schemas.microsoft.com/office/drawing/2014/main" id="{5DC06873-034A-44F5-B28D-3E3EE162DBE2}"/>
+                <a16:creationId xmlns:a16="http://schemas.microsoft.com/office/drawing/2014/main" id="{399D5567-AF83-4D1A-9F93-C169934F96DC}"/>
               </a:ext>
             </a:extLst>
           </p:cNvPr>
@@ -5546,7 +5546,7 @@
           <p:cNvPr id="2" name="">
             <a:extLst xmlns:a="http://schemas.openxmlformats.org/drawingml/2006/main">
               <a:ext uri="{FF2B5EF4-FFF2-40B4-BE49-F238E27FC236}">
-                <a16:creationId xmlns:a16="http://schemas.microsoft.com/office/drawing/2014/main" id="{1DE32149-1B65-46B2-83FA-905BC31F3E6E}"/>
+                <a16:creationId xmlns:a16="http://schemas.microsoft.com/office/drawing/2014/main" id="{A2B21DEB-918B-4260-90F6-E69C11F6FFCF}"/>
               </a:ext>
             </a:extLst>
           </p:cNvPr>
@@ -5603,7 +5603,7 @@
           <p:cNvPr id="3" name="">
             <a:extLst xmlns:a="http://schemas.openxmlformats.org/drawingml/2006/main">
               <a:ext uri="{FF2B5EF4-FFF2-40B4-BE49-F238E27FC236}">
-                <a16:creationId xmlns:a16="http://schemas.microsoft.com/office/drawing/2014/main" id="{0EBD99A4-9DFC-45D1-AB4E-C9D0E890C3F1}"/>
+                <a16:creationId xmlns:a16="http://schemas.microsoft.com/office/drawing/2014/main" id="{67462492-21F7-4EE3-9588-DECD432FA0F4}"/>
               </a:ext>
             </a:extLst>
           </p:cNvPr>
@@ -5660,7 +5660,7 @@
           <p:cNvPr id="4" name="">
             <a:extLst xmlns:a="http://schemas.openxmlformats.org/drawingml/2006/main">
               <a:ext uri="{FF2B5EF4-FFF2-40B4-BE49-F238E27FC236}">
-                <a16:creationId xmlns:a16="http://schemas.microsoft.com/office/drawing/2014/main" id="{E4B39E20-CF81-4DA5-BB74-1D814AE88284}"/>
+                <a16:creationId xmlns:a16="http://schemas.microsoft.com/office/drawing/2014/main" id="{F098C93E-4ACD-4A9A-AD47-C7ADB6051120}"/>
               </a:ext>
             </a:extLst>
           </p:cNvPr>
@@ -5717,7 +5717,7 @@
           <p:cNvPr id="5" name="">
             <a:extLst xmlns:a="http://schemas.openxmlformats.org/drawingml/2006/main">
               <a:ext uri="{FF2B5EF4-FFF2-40B4-BE49-F238E27FC236}">
-                <a16:creationId xmlns:a16="http://schemas.microsoft.com/office/drawing/2014/main" id="{A0CAFA94-1360-446F-AC65-1AB94B581F75}"/>
+                <a16:creationId xmlns:a16="http://schemas.microsoft.com/office/drawing/2014/main" id="{40926E43-76D7-4E32-A768-6815EA73FA88}"/>
               </a:ext>
             </a:extLst>
           </p:cNvPr>
@@ -5774,7 +5774,7 @@
           <p:cNvPr id="6" name="">
             <a:extLst xmlns:a="http://schemas.openxmlformats.org/drawingml/2006/main">
               <a:ext uri="{FF2B5EF4-FFF2-40B4-BE49-F238E27FC236}">
-                <a16:creationId xmlns:a16="http://schemas.microsoft.com/office/drawing/2014/main" id="{3A8BAAA0-A1EA-4AAC-BC84-FE4A4A0A2FB7}"/>
+                <a16:creationId xmlns:a16="http://schemas.microsoft.com/office/drawing/2014/main" id="{ACA3E636-4402-4267-BDBA-2D259F2D544C}"/>
               </a:ext>
             </a:extLst>
           </p:cNvPr>
@@ -5831,7 +5831,7 @@
           <p:cNvPr id="7" name="">
             <a:extLst xmlns:a="http://schemas.openxmlformats.org/drawingml/2006/main">
               <a:ext uri="{FF2B5EF4-FFF2-40B4-BE49-F238E27FC236}">
-                <a16:creationId xmlns:a16="http://schemas.microsoft.com/office/drawing/2014/main" id="{02A6730A-FA3F-41E3-A22B-145A5DB779D3}"/>
+                <a16:creationId xmlns:a16="http://schemas.microsoft.com/office/drawing/2014/main" id="{86B06A7C-0A0A-48B8-852F-F4B9841DA0C9}"/>
               </a:ext>
             </a:extLst>
           </p:cNvPr>
@@ -5888,7 +5888,7 @@
           <p:cNvPr id="8" name="">
             <a:extLst xmlns:a="http://schemas.openxmlformats.org/drawingml/2006/main">
               <a:ext uri="{FF2B5EF4-FFF2-40B4-BE49-F238E27FC236}">
-                <a16:creationId xmlns:a16="http://schemas.microsoft.com/office/drawing/2014/main" id="{859F7729-545B-4B3F-9E86-7320EC9FF90B}"/>
+                <a16:creationId xmlns:a16="http://schemas.microsoft.com/office/drawing/2014/main" id="{C4A491BC-60C9-4288-839D-36AD63EA5413}"/>
               </a:ext>
             </a:extLst>
           </p:cNvPr>
@@ -5945,7 +5945,7 @@
           <p:cNvPr id="9" name="">
             <a:extLst xmlns:a="http://schemas.openxmlformats.org/drawingml/2006/main">
               <a:ext uri="{FF2B5EF4-FFF2-40B4-BE49-F238E27FC236}">
-                <a16:creationId xmlns:a16="http://schemas.microsoft.com/office/drawing/2014/main" id="{BA1DADE1-E27D-4BD2-A63C-57D0D9389689}"/>
+                <a16:creationId xmlns:a16="http://schemas.microsoft.com/office/drawing/2014/main" id="{FB0E64AD-0679-4907-B858-3C2AB1CAFD95}"/>
               </a:ext>
             </a:extLst>
           </p:cNvPr>
@@ -6000,7 +6000,7 @@
     </p:spTree>
     <p:extLst>
       <p:ext uri="{BB962C8B-B14F-4D97-AF65-F5344CB8AC3E}">
-        <p14:creationId xmlns:p14="http://schemas.microsoft.com/office/powerpoint/2010/main" val="421976528"/>
+        <p14:creationId xmlns:p14="http://schemas.microsoft.com/office/powerpoint/2010/main" val="1268526071"/>
       </p:ext>
     </p:extLst>
   </p:cSld>
@@ -6031,7 +6031,7 @@
           <p:cNvPr id="10" name="">
             <a:extLst xmlns:a="http://schemas.openxmlformats.org/drawingml/2006/main">
               <a:ext uri="{FF2B5EF4-FFF2-40B4-BE49-F238E27FC236}">
-                <a16:creationId xmlns:a16="http://schemas.microsoft.com/office/drawing/2014/main" id="{2922100C-EF69-4189-96CA-60536D48EA87}"/>
+                <a16:creationId xmlns:a16="http://schemas.microsoft.com/office/drawing/2014/main" id="{5F8A38BD-D2F4-4D2D-802D-11D618D5B3A7}"/>
               </a:ext>
             </a:extLst>
           </p:cNvPr>
@@ -6088,7 +6088,7 @@
           <p:cNvPr id="2" name="">
             <a:extLst xmlns:a="http://schemas.openxmlformats.org/drawingml/2006/main">
               <a:ext uri="{FF2B5EF4-FFF2-40B4-BE49-F238E27FC236}">
-                <a16:creationId xmlns:a16="http://schemas.microsoft.com/office/drawing/2014/main" id="{1BF91AA5-C38C-4094-9610-CE7636C2E824}"/>
+                <a16:creationId xmlns:a16="http://schemas.microsoft.com/office/drawing/2014/main" id="{2A2F7D7C-B477-47C8-B2A4-46EF346170AC}"/>
               </a:ext>
             </a:extLst>
           </p:cNvPr>
@@ -6145,7 +6145,7 @@
           <p:cNvPr id="3" name="">
             <a:extLst xmlns:a="http://schemas.openxmlformats.org/drawingml/2006/main">
               <a:ext uri="{FF2B5EF4-FFF2-40B4-BE49-F238E27FC236}">
-                <a16:creationId xmlns:a16="http://schemas.microsoft.com/office/drawing/2014/main" id="{57735BBF-08BA-4D0A-9706-2C62ED06FB2C}"/>
+                <a16:creationId xmlns:a16="http://schemas.microsoft.com/office/drawing/2014/main" id="{0DD390DD-84CF-4F3F-B6EB-0C087A7EECF5}"/>
               </a:ext>
             </a:extLst>
           </p:cNvPr>
@@ -6202,7 +6202,7 @@
           <p:cNvPr id="4" name="">
             <a:extLst xmlns:a="http://schemas.openxmlformats.org/drawingml/2006/main">
               <a:ext uri="{FF2B5EF4-FFF2-40B4-BE49-F238E27FC236}">
-                <a16:creationId xmlns:a16="http://schemas.microsoft.com/office/drawing/2014/main" id="{2E146DD8-4830-4EEF-BC16-580AF31DDEA1}"/>
+                <a16:creationId xmlns:a16="http://schemas.microsoft.com/office/drawing/2014/main" id="{8042878E-AE8D-4050-A653-C76215F972D9}"/>
               </a:ext>
             </a:extLst>
           </p:cNvPr>
@@ -6259,7 +6259,7 @@
           <p:cNvPr id="5" name="">
             <a:extLst xmlns:a="http://schemas.openxmlformats.org/drawingml/2006/main">
               <a:ext uri="{FF2B5EF4-FFF2-40B4-BE49-F238E27FC236}">
-                <a16:creationId xmlns:a16="http://schemas.microsoft.com/office/drawing/2014/main" id="{20C458C3-3517-4BFC-878D-3B07A1F3BE21}"/>
+                <a16:creationId xmlns:a16="http://schemas.microsoft.com/office/drawing/2014/main" id="{5EE8F13A-F9CE-4F78-AE9B-6B9E66E3E543}"/>
               </a:ext>
             </a:extLst>
           </p:cNvPr>
@@ -6316,7 +6316,7 @@
           <p:cNvPr id="6" name="">
             <a:extLst xmlns:a="http://schemas.openxmlformats.org/drawingml/2006/main">
               <a:ext uri="{FF2B5EF4-FFF2-40B4-BE49-F238E27FC236}">
-                <a16:creationId xmlns:a16="http://schemas.microsoft.com/office/drawing/2014/main" id="{43EEF027-A079-42B2-A722-4E93CE7E1AB4}"/>
+                <a16:creationId xmlns:a16="http://schemas.microsoft.com/office/drawing/2014/main" id="{32EBA09D-6A36-43A3-A45D-101D0E2BC42D}"/>
               </a:ext>
             </a:extLst>
           </p:cNvPr>
@@ -6373,7 +6373,7 @@
           <p:cNvPr id="7" name="">
             <a:extLst xmlns:a="http://schemas.openxmlformats.org/drawingml/2006/main">
               <a:ext uri="{FF2B5EF4-FFF2-40B4-BE49-F238E27FC236}">
-                <a16:creationId xmlns:a16="http://schemas.microsoft.com/office/drawing/2014/main" id="{75A40946-5D77-44D6-B044-A61D2BBDFC18}"/>
+                <a16:creationId xmlns:a16="http://schemas.microsoft.com/office/drawing/2014/main" id="{2A75CCC4-0A91-4ADF-9DCF-49C519C9D8E2}"/>
               </a:ext>
             </a:extLst>
           </p:cNvPr>
@@ -6430,7 +6430,7 @@
           <p:cNvPr id="8" name="">
             <a:extLst xmlns:a="http://schemas.openxmlformats.org/drawingml/2006/main">
               <a:ext uri="{FF2B5EF4-FFF2-40B4-BE49-F238E27FC236}">
-                <a16:creationId xmlns:a16="http://schemas.microsoft.com/office/drawing/2014/main" id="{67600A4D-2C61-474B-8A05-3684B59EDF98}"/>
+                <a16:creationId xmlns:a16="http://schemas.microsoft.com/office/drawing/2014/main" id="{F7D19A3E-76E2-4A34-9876-DF495CD141B8}"/>
               </a:ext>
             </a:extLst>
           </p:cNvPr>
@@ -6487,7 +6487,7 @@
           <p:cNvPr id="9" name="">
             <a:extLst xmlns:a="http://schemas.openxmlformats.org/drawingml/2006/main">
               <a:ext uri="{FF2B5EF4-FFF2-40B4-BE49-F238E27FC236}">
-                <a16:creationId xmlns:a16="http://schemas.microsoft.com/office/drawing/2014/main" id="{7DD927AE-A296-443F-9E82-7C320B4CCB5F}"/>
+                <a16:creationId xmlns:a16="http://schemas.microsoft.com/office/drawing/2014/main" id="{A24C8290-C41D-4F79-A6EC-4ADF80BF94F2}"/>
               </a:ext>
             </a:extLst>
           </p:cNvPr>
@@ -6542,7 +6542,7 @@
     </p:spTree>
     <p:extLst>
       <p:ext uri="{BB962C8B-B14F-4D97-AF65-F5344CB8AC3E}">
-        <p14:creationId xmlns:p14="http://schemas.microsoft.com/office/powerpoint/2010/main" val="106795385"/>
+        <p14:creationId xmlns:p14="http://schemas.microsoft.com/office/powerpoint/2010/main" val="1147139421"/>
       </p:ext>
     </p:extLst>
   </p:cSld>
